--- a/ParallelLSTM/result/성능개선 3 , 4 통합 결과.pptx
+++ b/ParallelLSTM/result/성능개선 3 , 4 통합 결과.pptx
@@ -286,7 +286,7 @@
           <a:p>
             <a:fld id="{B72759B8-7332-44BD-B1FF-13450B6DA7DC}" type="datetimeFigureOut">
               <a:rPr lang="ko-KR" altLang="en-US" smtClean="0"/>
-              <a:t>2026-01-16</a:t>
+              <a:t>2026-01-19</a:t>
             </a:fld>
             <a:endParaRPr lang="ko-KR" altLang="en-US"/>
           </a:p>
@@ -456,7 +456,7 @@
           <a:p>
             <a:fld id="{B72759B8-7332-44BD-B1FF-13450B6DA7DC}" type="datetimeFigureOut">
               <a:rPr lang="ko-KR" altLang="en-US" smtClean="0"/>
-              <a:t>2026-01-16</a:t>
+              <a:t>2026-01-19</a:t>
             </a:fld>
             <a:endParaRPr lang="ko-KR" altLang="en-US"/>
           </a:p>
@@ -636,7 +636,7 @@
           <a:p>
             <a:fld id="{B72759B8-7332-44BD-B1FF-13450B6DA7DC}" type="datetimeFigureOut">
               <a:rPr lang="ko-KR" altLang="en-US" smtClean="0"/>
-              <a:t>2026-01-16</a:t>
+              <a:t>2026-01-19</a:t>
             </a:fld>
             <a:endParaRPr lang="ko-KR" altLang="en-US"/>
           </a:p>
@@ -806,7 +806,7 @@
           <a:p>
             <a:fld id="{B72759B8-7332-44BD-B1FF-13450B6DA7DC}" type="datetimeFigureOut">
               <a:rPr lang="ko-KR" altLang="en-US" smtClean="0"/>
-              <a:t>2026-01-16</a:t>
+              <a:t>2026-01-19</a:t>
             </a:fld>
             <a:endParaRPr lang="ko-KR" altLang="en-US"/>
           </a:p>
@@ -1057,7 +1057,7 @@
           <a:p>
             <a:fld id="{B72759B8-7332-44BD-B1FF-13450B6DA7DC}" type="datetimeFigureOut">
               <a:rPr lang="ko-KR" altLang="en-US" smtClean="0"/>
-              <a:t>2026-01-16</a:t>
+              <a:t>2026-01-19</a:t>
             </a:fld>
             <a:endParaRPr lang="ko-KR" altLang="en-US"/>
           </a:p>
@@ -1289,7 +1289,7 @@
           <a:p>
             <a:fld id="{B72759B8-7332-44BD-B1FF-13450B6DA7DC}" type="datetimeFigureOut">
               <a:rPr lang="ko-KR" altLang="en-US" smtClean="0"/>
-              <a:t>2026-01-16</a:t>
+              <a:t>2026-01-19</a:t>
             </a:fld>
             <a:endParaRPr lang="ko-KR" altLang="en-US"/>
           </a:p>
@@ -1636,7 +1636,7 @@
           <a:p>
             <a:fld id="{B72759B8-7332-44BD-B1FF-13450B6DA7DC}" type="datetimeFigureOut">
               <a:rPr lang="ko-KR" altLang="en-US" smtClean="0"/>
-              <a:t>2026-01-16</a:t>
+              <a:t>2026-01-19</a:t>
             </a:fld>
             <a:endParaRPr lang="ko-KR" altLang="en-US"/>
           </a:p>
@@ -1754,7 +1754,7 @@
           <a:p>
             <a:fld id="{B72759B8-7332-44BD-B1FF-13450B6DA7DC}" type="datetimeFigureOut">
               <a:rPr lang="ko-KR" altLang="en-US" smtClean="0"/>
-              <a:t>2026-01-16</a:t>
+              <a:t>2026-01-19</a:t>
             </a:fld>
             <a:endParaRPr lang="ko-KR" altLang="en-US"/>
           </a:p>
@@ -1872,7 +1872,7 @@
           <a:p>
             <a:fld id="{B72759B8-7332-44BD-B1FF-13450B6DA7DC}" type="datetimeFigureOut">
               <a:rPr lang="ko-KR" altLang="en-US" smtClean="0"/>
-              <a:t>2026-01-16</a:t>
+              <a:t>2026-01-19</a:t>
             </a:fld>
             <a:endParaRPr lang="ko-KR" altLang="en-US"/>
           </a:p>
@@ -2156,7 +2156,7 @@
           <a:p>
             <a:fld id="{B72759B8-7332-44BD-B1FF-13450B6DA7DC}" type="datetimeFigureOut">
               <a:rPr lang="ko-KR" altLang="en-US" smtClean="0"/>
-              <a:t>2026-01-16</a:t>
+              <a:t>2026-01-19</a:t>
             </a:fld>
             <a:endParaRPr lang="ko-KR" altLang="en-US"/>
           </a:p>
@@ -2420,7 +2420,7 @@
           <a:p>
             <a:fld id="{B72759B8-7332-44BD-B1FF-13450B6DA7DC}" type="datetimeFigureOut">
               <a:rPr lang="ko-KR" altLang="en-US" smtClean="0"/>
-              <a:t>2026-01-16</a:t>
+              <a:t>2026-01-19</a:t>
             </a:fld>
             <a:endParaRPr lang="ko-KR" altLang="en-US"/>
           </a:p>
@@ -2634,7 +2634,7 @@
           <a:p>
             <a:fld id="{B72759B8-7332-44BD-B1FF-13450B6DA7DC}" type="datetimeFigureOut">
               <a:rPr lang="ko-KR" altLang="en-US" smtClean="0"/>
-              <a:t>2026-01-16</a:t>
+              <a:t>2026-01-19</a:t>
             </a:fld>
             <a:endParaRPr lang="ko-KR" altLang="en-US"/>
           </a:p>
@@ -4216,8 +4216,8 @@
         </p:blipFill>
         <p:spPr>
           <a:xfrm>
-            <a:off x="9767009" y="1404829"/>
-            <a:ext cx="2121773" cy="1102705"/>
+            <a:off x="9769211" y="1404829"/>
+            <a:ext cx="2117369" cy="1102705"/>
           </a:xfrm>
           <a:prstGeom prst="rect">
             <a:avLst/>
@@ -4366,8 +4366,8 @@
         </p:blipFill>
         <p:spPr>
           <a:xfrm>
-            <a:off x="7419558" y="638495"/>
-            <a:ext cx="4470398" cy="681074"/>
+            <a:off x="7419558" y="640550"/>
+            <a:ext cx="4470398" cy="676963"/>
           </a:xfrm>
           <a:prstGeom prst="rect">
             <a:avLst/>
@@ -4613,7 +4613,7 @@
           <p:nvPr>
             <p:extLst>
               <p:ext uri="{D42A27DB-BD31-4B8C-83A1-F6EECF244321}">
-                <p14:modId xmlns:p14="http://schemas.microsoft.com/office/powerpoint/2010/main" val="883285064"/>
+                <p14:modId xmlns:p14="http://schemas.microsoft.com/office/powerpoint/2010/main" val="702346262"/>
               </p:ext>
             </p:extLst>
           </p:nvPr>
@@ -4717,7 +4717,7 @@
                             <a:srgbClr val="FF0000"/>
                           </a:solidFill>
                         </a:rPr>
-                        <a:t>0.3454</a:t>
+                        <a:t>0.0143</a:t>
                       </a:r>
                     </a:p>
                     <a:p>
@@ -4728,7 +4728,7 @@
                       </a:r>
                       <a:r>
                         <a:rPr lang="en-US" altLang="ko-KR" sz="1400" dirty="0"/>
-                        <a:t>0.0349</a:t>
+                        <a:t>0.0468</a:t>
                       </a:r>
                     </a:p>
                     <a:p>
@@ -4739,7 +4739,7 @@
                       </a:r>
                       <a:r>
                         <a:rPr lang="en-US" altLang="ko-KR" sz="1400" dirty="0"/>
-                        <a:t>0.1454</a:t>
+                        <a:t>0.1858</a:t>
                       </a:r>
                     </a:p>
                     <a:p>
@@ -4749,8 +4749,8 @@
                         <a:t>rmse : </a:t>
                       </a:r>
                       <a:r>
-                        <a:rPr lang="en-US" altLang="ko-KR" sz="1400" dirty="0"/>
-                        <a:t>0.1869</a:t>
+                        <a:rPr lang="en-US" altLang="ko-KR" sz="1400"/>
+                        <a:t>0.2164</a:t>
                       </a:r>
                       <a:endParaRPr lang="pt-BR" altLang="ko-KR" sz="1400" dirty="0"/>
                     </a:p>
@@ -7458,7 +7458,7 @@
             </a:r>
             <a:r>
               <a:rPr lang="en-US" altLang="ko-KR" sz="1050" dirty="0"/>
-              <a:t>/dg)_110_4_2</a:t>
+              <a:t>/dg)_110_4</a:t>
             </a:r>
             <a:endParaRPr lang="ko-KR" altLang="en-US" sz="1050" dirty="0">
               <a:latin typeface="+mj-ea"/>
@@ -7940,8 +7940,8 @@
         </p:blipFill>
         <p:spPr>
           <a:xfrm>
-            <a:off x="9758527" y="1391323"/>
-            <a:ext cx="2138738" cy="1129717"/>
+            <a:off x="9758527" y="1395930"/>
+            <a:ext cx="2138738" cy="1120503"/>
           </a:xfrm>
           <a:prstGeom prst="rect">
             <a:avLst/>
@@ -8090,8 +8090,8 @@
         </p:blipFill>
         <p:spPr>
           <a:xfrm>
-            <a:off x="7466229" y="638495"/>
-            <a:ext cx="4431036" cy="681074"/>
+            <a:off x="7452112" y="638495"/>
+            <a:ext cx="4437902" cy="681074"/>
           </a:xfrm>
           <a:prstGeom prst="rect">
             <a:avLst/>
@@ -8473,7 +8473,7 @@
             </a:r>
             <a:r>
               <a:rPr lang="en-US" altLang="ko-KR" sz="1050" dirty="0"/>
-              <a:t>/dg)_110_4_2</a:t>
+              <a:t>/dg)_110_4</a:t>
             </a:r>
             <a:endParaRPr lang="ko-KR" altLang="en-US" sz="1050" dirty="0">
               <a:latin typeface="+mj-ea"/>
@@ -8496,7 +8496,7 @@
           <p:nvPr>
             <p:extLst>
               <p:ext uri="{D42A27DB-BD31-4B8C-83A1-F6EECF244321}">
-                <p14:modId xmlns:p14="http://schemas.microsoft.com/office/powerpoint/2010/main" val="2704823255"/>
+                <p14:modId xmlns:p14="http://schemas.microsoft.com/office/powerpoint/2010/main" val="1336420058"/>
               </p:ext>
             </p:extLst>
           </p:nvPr>
@@ -8600,7 +8600,7 @@
                             <a:srgbClr val="FF0000"/>
                           </a:solidFill>
                         </a:rPr>
-                        <a:t>-0.0894</a:t>
+                        <a:t>0.7623</a:t>
                       </a:r>
                     </a:p>
                     <a:p>
@@ -8611,7 +8611,7 @@
                       </a:r>
                       <a:r>
                         <a:rPr lang="en-US" altLang="ko-KR" sz="1400" dirty="0"/>
-                        <a:t>0.1015</a:t>
+                        <a:t>0.0192</a:t>
                       </a:r>
                     </a:p>
                     <a:p>
@@ -8622,7 +8622,7 @@
                       </a:r>
                       <a:r>
                         <a:rPr lang="en-US" altLang="ko-KR" sz="1400" dirty="0"/>
-                        <a:t>0.2527</a:t>
+                        <a:t>0.0851</a:t>
                       </a:r>
                     </a:p>
                     <a:p>
@@ -8633,7 +8633,7 @@
                       </a:r>
                       <a:r>
                         <a:rPr lang="en-US" altLang="ko-KR" sz="1400" dirty="0"/>
-                        <a:t>0.3186</a:t>
+                        <a:t>0.1386</a:t>
                       </a:r>
                       <a:endParaRPr lang="pt-BR" altLang="ko-KR" sz="1400" dirty="0"/>
                     </a:p>
@@ -9490,7 +9490,7 @@
             </a:r>
             <a:r>
               <a:rPr lang="en-US" altLang="ko-KR" sz="1050" dirty="0"/>
-              <a:t>/dg)_110_4_2</a:t>
+              <a:t>/dg)_110_4</a:t>
             </a:r>
             <a:endParaRPr lang="ko-KR" altLang="en-US" sz="1050" dirty="0">
               <a:latin typeface="+mj-ea"/>
@@ -9991,8 +9991,8 @@
         </p:blipFill>
         <p:spPr>
           <a:xfrm>
-            <a:off x="9767009" y="1397573"/>
-            <a:ext cx="2121773" cy="1117217"/>
+            <a:off x="9767009" y="1397588"/>
+            <a:ext cx="2121773" cy="1117187"/>
           </a:xfrm>
           <a:prstGeom prst="rect">
             <a:avLst/>
@@ -10141,8 +10141,8 @@
         </p:blipFill>
         <p:spPr>
           <a:xfrm>
-            <a:off x="7419558" y="638495"/>
-            <a:ext cx="4470398" cy="681074"/>
+            <a:off x="7418382" y="638495"/>
+            <a:ext cx="4470399" cy="681074"/>
           </a:xfrm>
           <a:prstGeom prst="rect">
             <a:avLst/>
@@ -10524,7 +10524,7 @@
             </a:r>
             <a:r>
               <a:rPr lang="en-US" altLang="ko-KR" sz="1050" dirty="0"/>
-              <a:t>/dg)_110_4_2</a:t>
+              <a:t>/dg)_110_4</a:t>
             </a:r>
             <a:endParaRPr lang="ko-KR" altLang="en-US" sz="1050" dirty="0">
               <a:latin typeface="+mj-ea"/>
@@ -10547,7 +10547,7 @@
           <p:nvPr>
             <p:extLst>
               <p:ext uri="{D42A27DB-BD31-4B8C-83A1-F6EECF244321}">
-                <p14:modId xmlns:p14="http://schemas.microsoft.com/office/powerpoint/2010/main" val="3928718462"/>
+                <p14:modId xmlns:p14="http://schemas.microsoft.com/office/powerpoint/2010/main" val="1222747119"/>
               </p:ext>
             </p:extLst>
           </p:nvPr>
@@ -10651,7 +10651,7 @@
                             <a:srgbClr val="FF0000"/>
                           </a:solidFill>
                         </a:rPr>
-                        <a:t>-0.7705</a:t>
+                        <a:t>0.0871</a:t>
                       </a:r>
                     </a:p>
                     <a:p>
@@ -10662,7 +10662,7 @@
                       </a:r>
                       <a:r>
                         <a:rPr lang="en-US" altLang="ko-KR" sz="1400" dirty="0"/>
-                        <a:t>0.0945</a:t>
+                        <a:t>0.0434</a:t>
                       </a:r>
                     </a:p>
                     <a:p>
@@ -10673,7 +10673,7 @@
                       </a:r>
                       <a:r>
                         <a:rPr lang="en-US" altLang="ko-KR" sz="1400" dirty="0"/>
-                        <a:t>0.2284</a:t>
+                        <a:t>0.1510</a:t>
                       </a:r>
                     </a:p>
                     <a:p>
@@ -10684,7 +10684,7 @@
                       </a:r>
                       <a:r>
                         <a:rPr lang="en-US" altLang="ko-KR" sz="1400" dirty="0"/>
-                        <a:t>0.3075</a:t>
+                        <a:t>0.2083</a:t>
                       </a:r>
                       <a:endParaRPr lang="pt-BR" altLang="ko-KR" sz="1400" dirty="0"/>
                     </a:p>
@@ -13079,7 +13079,7 @@
             </a:r>
             <a:r>
               <a:rPr lang="en-US" altLang="ko-KR" sz="1050" dirty="0"/>
-              <a:t>/dg)_110_5_2</a:t>
+              <a:t>/dg)_110_5</a:t>
             </a:r>
             <a:endParaRPr lang="ko-KR" altLang="en-US" sz="1050" dirty="0">
               <a:latin typeface="+mj-ea"/>
@@ -13635,8 +13635,8 @@
         </p:blipFill>
         <p:spPr>
           <a:xfrm>
-            <a:off x="9758527" y="1396151"/>
-            <a:ext cx="2138738" cy="1120061"/>
+            <a:off x="9762067" y="1396151"/>
+            <a:ext cx="2131657" cy="1120061"/>
           </a:xfrm>
           <a:prstGeom prst="rect">
             <a:avLst/>
@@ -13785,8 +13785,8 @@
         </p:blipFill>
         <p:spPr>
           <a:xfrm>
-            <a:off x="7466229" y="638495"/>
-            <a:ext cx="4431036" cy="681074"/>
+            <a:off x="7466229" y="641227"/>
+            <a:ext cx="4431036" cy="675611"/>
           </a:xfrm>
           <a:prstGeom prst="rect">
             <a:avLst/>
@@ -14168,7 +14168,7 @@
             </a:r>
             <a:r>
               <a:rPr lang="en-US" altLang="ko-KR" sz="1050" dirty="0"/>
-              <a:t>/dg)_110_5_2</a:t>
+              <a:t>/dg)_110_5</a:t>
             </a:r>
             <a:endParaRPr lang="ko-KR" altLang="en-US" sz="1050" dirty="0">
               <a:latin typeface="+mj-ea"/>
@@ -14191,7 +14191,7 @@
           <p:nvPr>
             <p:extLst>
               <p:ext uri="{D42A27DB-BD31-4B8C-83A1-F6EECF244321}">
-                <p14:modId xmlns:p14="http://schemas.microsoft.com/office/powerpoint/2010/main" val="2301873143"/>
+                <p14:modId xmlns:p14="http://schemas.microsoft.com/office/powerpoint/2010/main" val="2773781752"/>
               </p:ext>
             </p:extLst>
           </p:nvPr>
@@ -14295,7 +14295,7 @@
                             <a:srgbClr val="FF0000"/>
                           </a:solidFill>
                         </a:rPr>
-                        <a:t>0.1532</a:t>
+                        <a:t>0.7051</a:t>
                       </a:r>
                     </a:p>
                     <a:p>
@@ -14306,7 +14306,7 @@
                       </a:r>
                       <a:r>
                         <a:rPr lang="en-US" altLang="ko-KR" sz="1400" dirty="0"/>
-                        <a:t>0.0789</a:t>
+                        <a:t>0.0238</a:t>
                       </a:r>
                     </a:p>
                     <a:p>
@@ -14317,7 +14317,7 @@
                       </a:r>
                       <a:r>
                         <a:rPr lang="en-US" altLang="ko-KR" sz="1400" dirty="0"/>
-                        <a:t>0.2090</a:t>
+                        <a:t>0.0874</a:t>
                       </a:r>
                     </a:p>
                     <a:p>
@@ -14328,7 +14328,7 @@
                       </a:r>
                       <a:r>
                         <a:rPr lang="en-US" altLang="ko-KR" sz="1400" dirty="0"/>
-                        <a:t>0.2809</a:t>
+                        <a:t>0.1544</a:t>
                       </a:r>
                       <a:endParaRPr lang="pt-BR" altLang="ko-KR" sz="1400" dirty="0"/>
                     </a:p>
@@ -15189,7 +15189,7 @@
             </a:r>
             <a:r>
               <a:rPr lang="en-US" altLang="ko-KR" sz="1050" dirty="0"/>
-              <a:t>/dg)_110_5_2</a:t>
+              <a:t>/dg)_110_5</a:t>
             </a:r>
             <a:endParaRPr lang="ko-KR" altLang="en-US" sz="1050" dirty="0">
               <a:latin typeface="+mj-ea"/>
@@ -15686,8 +15686,8 @@
         </p:blipFill>
         <p:spPr>
           <a:xfrm>
-            <a:off x="9767009" y="1397573"/>
-            <a:ext cx="2121773" cy="1117217"/>
+            <a:off x="9767009" y="1398168"/>
+            <a:ext cx="2121773" cy="1116026"/>
           </a:xfrm>
           <a:prstGeom prst="rect">
             <a:avLst/>
@@ -15836,8 +15836,8 @@
         </p:blipFill>
         <p:spPr>
           <a:xfrm>
-            <a:off x="7419558" y="638495"/>
-            <a:ext cx="4470398" cy="681074"/>
+            <a:off x="7419558" y="640550"/>
+            <a:ext cx="4470398" cy="676963"/>
           </a:xfrm>
           <a:prstGeom prst="rect">
             <a:avLst/>
@@ -16219,7 +16219,7 @@
             </a:r>
             <a:r>
               <a:rPr lang="en-US" altLang="ko-KR" sz="1050" dirty="0"/>
-              <a:t>/dg)_110_5_2</a:t>
+              <a:t>/dg)_110_5</a:t>
             </a:r>
             <a:endParaRPr lang="ko-KR" altLang="en-US" sz="1050" dirty="0">
               <a:latin typeface="+mj-ea"/>
@@ -16242,7 +16242,7 @@
           <p:nvPr>
             <p:extLst>
               <p:ext uri="{D42A27DB-BD31-4B8C-83A1-F6EECF244321}">
-                <p14:modId xmlns:p14="http://schemas.microsoft.com/office/powerpoint/2010/main" val="2217300261"/>
+                <p14:modId xmlns:p14="http://schemas.microsoft.com/office/powerpoint/2010/main" val="1475299182"/>
               </p:ext>
             </p:extLst>
           </p:nvPr>
@@ -16346,7 +16346,7 @@
                             <a:srgbClr val="FF0000"/>
                           </a:solidFill>
                         </a:rPr>
-                        <a:t>-0.551</a:t>
+                        <a:t>0.5130</a:t>
                       </a:r>
                     </a:p>
                     <a:p>
@@ -16357,7 +16357,7 @@
                       </a:r>
                       <a:r>
                         <a:rPr lang="en-US" altLang="ko-KR" sz="1400" dirty="0"/>
-                        <a:t>0.1258</a:t>
+                        <a:t>0.0231</a:t>
                       </a:r>
                     </a:p>
                     <a:p>
@@ -16368,7 +16368,7 @@
                       </a:r>
                       <a:r>
                         <a:rPr lang="en-US" altLang="ko-KR" sz="1400" dirty="0"/>
-                        <a:t>0.2542</a:t>
+                        <a:t>0.1419</a:t>
                       </a:r>
                     </a:p>
                     <a:p>
@@ -16379,7 +16379,7 @@
                       </a:r>
                       <a:r>
                         <a:rPr lang="en-US" altLang="ko-KR" sz="1400" dirty="0"/>
-                        <a:t>0.3547</a:t>
+                        <a:t>0.1521</a:t>
                       </a:r>
                       <a:endParaRPr lang="pt-BR" altLang="ko-KR" sz="1400" dirty="0"/>
                     </a:p>
@@ -18483,7 +18483,7 @@
             </a:r>
             <a:r>
               <a:rPr lang="en-US" altLang="ko-KR" sz="1050" dirty="0"/>
-              <a:t>/dg)_wl18_3_2</a:t>
+              <a:t>/dg)_wl18_3</a:t>
             </a:r>
             <a:endParaRPr lang="ko-KR" altLang="en-US" sz="1050" dirty="0">
               <a:latin typeface="+mj-ea"/>
@@ -19336,8 +19336,8 @@
         </p:blipFill>
         <p:spPr>
           <a:xfrm>
-            <a:off x="9758527" y="1390626"/>
-            <a:ext cx="2138738" cy="1131110"/>
+            <a:off x="9758527" y="1403711"/>
+            <a:ext cx="2138738" cy="1104940"/>
           </a:xfrm>
           <a:prstGeom prst="rect">
             <a:avLst/>
@@ -19501,7 +19501,7 @@
             </a:r>
             <a:r>
               <a:rPr lang="en-US" altLang="ko-KR" sz="1050" dirty="0"/>
-              <a:t>/dg)_wl18_3_2</a:t>
+              <a:t>/dg)_wl18_3</a:t>
             </a:r>
             <a:endParaRPr lang="ko-KR" altLang="en-US" sz="1050" dirty="0">
               <a:latin typeface="+mj-ea"/>
@@ -19537,8 +19537,8 @@
         </p:blipFill>
         <p:spPr>
           <a:xfrm>
-            <a:off x="7466229" y="638495"/>
-            <a:ext cx="4431036" cy="681074"/>
+            <a:off x="7466229" y="641227"/>
+            <a:ext cx="4431036" cy="675611"/>
           </a:xfrm>
           <a:prstGeom prst="rect">
             <a:avLst/>
@@ -19902,7 +19902,11 @@
             <a:graphicFrameLocks noGrp="1"/>
           </p:cNvGraphicFramePr>
           <p:nvPr>
-            <p:extLst/>
+            <p:extLst>
+              <p:ext uri="{D42A27DB-BD31-4B8C-83A1-F6EECF244321}">
+                <p14:modId xmlns:p14="http://schemas.microsoft.com/office/powerpoint/2010/main" val="2655754682"/>
+              </p:ext>
+            </p:extLst>
           </p:nvPr>
         </p:nvGraphicFramePr>
         <p:xfrm>
@@ -20004,7 +20008,7 @@
                             <a:srgbClr val="FF0000"/>
                           </a:solidFill>
                         </a:rPr>
-                        <a:t>-0.0236</a:t>
+                        <a:t>0.7308</a:t>
                       </a:r>
                     </a:p>
                     <a:p>
@@ -20015,7 +20019,7 @@
                       </a:r>
                       <a:r>
                         <a:rPr lang="en-US" altLang="ko-KR" sz="1400" dirty="0"/>
-                        <a:t>0.0953</a:t>
+                        <a:t>0.0217</a:t>
                       </a:r>
                     </a:p>
                     <a:p>
@@ -20026,7 +20030,7 @@
                       </a:r>
                       <a:r>
                         <a:rPr lang="en-US" altLang="ko-KR" sz="1400" dirty="0"/>
-                        <a:t>0.2271</a:t>
+                        <a:t>0.0962</a:t>
                       </a:r>
                     </a:p>
                     <a:p>
@@ -20037,7 +20041,7 @@
                       </a:r>
                       <a:r>
                         <a:rPr lang="en-US" altLang="ko-KR" sz="1400" dirty="0"/>
-                        <a:t>0.3088</a:t>
+                        <a:t>0.1475</a:t>
                       </a:r>
                       <a:endParaRPr lang="pt-BR" altLang="ko-KR" sz="1400" dirty="0"/>
                     </a:p>
@@ -20534,7 +20538,7 @@
             </a:r>
             <a:r>
               <a:rPr lang="en-US" altLang="ko-KR" sz="1050" dirty="0"/>
-              <a:t>/dg)_wl18_3_2</a:t>
+              <a:t>/dg)_wl18_3</a:t>
             </a:r>
             <a:endParaRPr lang="ko-KR" altLang="en-US" sz="1050" dirty="0">
               <a:latin typeface="+mj-ea"/>
@@ -21386,8 +21390,8 @@
         </p:blipFill>
         <p:spPr>
           <a:xfrm>
-            <a:off x="9768969" y="1397573"/>
-            <a:ext cx="2117853" cy="1117217"/>
+            <a:off x="9768969" y="1403554"/>
+            <a:ext cx="2117853" cy="1105254"/>
           </a:xfrm>
           <a:prstGeom prst="rect">
             <a:avLst/>
@@ -21551,7 +21555,7 @@
             </a:r>
             <a:r>
               <a:rPr lang="en-US" altLang="ko-KR" sz="1050" dirty="0"/>
-              <a:t>/dg)_wl18_3_2</a:t>
+              <a:t>/dg)_wl18_3</a:t>
             </a:r>
             <a:endParaRPr lang="ko-KR" altLang="en-US" sz="1050" dirty="0">
               <a:latin typeface="+mj-ea"/>
@@ -21587,8 +21591,8 @@
         </p:blipFill>
         <p:spPr>
           <a:xfrm>
-            <a:off x="7419558" y="638495"/>
-            <a:ext cx="4470398" cy="681074"/>
+            <a:off x="7419558" y="640550"/>
+            <a:ext cx="4470398" cy="676963"/>
           </a:xfrm>
           <a:prstGeom prst="rect">
             <a:avLst/>
@@ -21952,7 +21956,11 @@
             <a:graphicFrameLocks noGrp="1"/>
           </p:cNvGraphicFramePr>
           <p:nvPr>
-            <p:extLst/>
+            <p:extLst>
+              <p:ext uri="{D42A27DB-BD31-4B8C-83A1-F6EECF244321}">
+                <p14:modId xmlns:p14="http://schemas.microsoft.com/office/powerpoint/2010/main" val="904875855"/>
+              </p:ext>
+            </p:extLst>
           </p:nvPr>
         </p:nvGraphicFramePr>
         <p:xfrm>
@@ -22054,7 +22062,7 @@
                             <a:srgbClr val="FF0000"/>
                           </a:solidFill>
                         </a:rPr>
-                        <a:t>-2.7619</a:t>
+                        <a:t>0.6749</a:t>
                       </a:r>
                     </a:p>
                     <a:p>
@@ -22065,7 +22073,7 @@
                       </a:r>
                       <a:r>
                         <a:rPr lang="en-US" altLang="ko-KR" sz="1400" dirty="0"/>
-                        <a:t>0.2009</a:t>
+                        <a:t>0.0154</a:t>
                       </a:r>
                     </a:p>
                     <a:p>
@@ -22076,7 +22084,7 @@
                       </a:r>
                       <a:r>
                         <a:rPr lang="en-US" altLang="ko-KR" sz="1400" dirty="0"/>
-                        <a:t>0.3459</a:t>
+                        <a:t>0.0960</a:t>
                       </a:r>
                     </a:p>
                     <a:p>
@@ -22087,7 +22095,7 @@
                       </a:r>
                       <a:r>
                         <a:rPr lang="en-US" altLang="ko-KR" sz="1400" dirty="0"/>
-                        <a:t>0.4482</a:t>
+                        <a:t>0.1243</a:t>
                       </a:r>
                       <a:endParaRPr lang="pt-BR" altLang="ko-KR" sz="1400" dirty="0"/>
                     </a:p>
@@ -25913,7 +25921,11 @@
             </a:r>
             <a:r>
               <a:rPr lang="en-US" altLang="ko-KR" sz="1050" dirty="0"/>
-              <a:t>/dg)_huber2</a:t>
+              <a:t>/dg)_</a:t>
+            </a:r>
+            <a:r>
+              <a:rPr lang="en-US" altLang="ko-KR" sz="1050" dirty="0" err="1"/>
+              <a:t>huber</a:t>
             </a:r>
             <a:endParaRPr lang="ko-KR" altLang="en-US" sz="1050" dirty="0">
               <a:latin typeface="+mj-ea"/>
@@ -26509,8 +26521,8 @@
         </p:blipFill>
         <p:spPr>
           <a:xfrm>
-            <a:off x="9758527" y="1390626"/>
-            <a:ext cx="2138738" cy="1131110"/>
+            <a:off x="9758527" y="1394234"/>
+            <a:ext cx="2138738" cy="1123894"/>
           </a:xfrm>
           <a:prstGeom prst="rect">
             <a:avLst/>
@@ -26659,8 +26671,8 @@
         </p:blipFill>
         <p:spPr>
           <a:xfrm>
-            <a:off x="7466230" y="638495"/>
-            <a:ext cx="4431035" cy="681074"/>
+            <a:off x="7466230" y="641227"/>
+            <a:ext cx="4431035" cy="675611"/>
           </a:xfrm>
           <a:prstGeom prst="rect">
             <a:avLst/>
@@ -26934,7 +26946,11 @@
             </a:r>
             <a:r>
               <a:rPr lang="en-US" altLang="ko-KR" sz="1050" dirty="0"/>
-              <a:t>/dg)_huber2</a:t>
+              <a:t>/dg)_</a:t>
+            </a:r>
+            <a:r>
+              <a:rPr lang="en-US" altLang="ko-KR" sz="1050" dirty="0" err="1"/>
+              <a:t>huber</a:t>
             </a:r>
             <a:endParaRPr lang="ko-KR" altLang="en-US" sz="1050" dirty="0">
               <a:latin typeface="+mj-ea"/>
@@ -26957,7 +26973,7 @@
           <p:nvPr>
             <p:extLst>
               <p:ext uri="{D42A27DB-BD31-4B8C-83A1-F6EECF244321}">
-                <p14:modId xmlns:p14="http://schemas.microsoft.com/office/powerpoint/2010/main" val="5532871"/>
+                <p14:modId xmlns:p14="http://schemas.microsoft.com/office/powerpoint/2010/main" val="2840134256"/>
               </p:ext>
             </p:extLst>
           </p:nvPr>
@@ -27061,7 +27077,7 @@
                             <a:srgbClr val="FF0000"/>
                           </a:solidFill>
                         </a:rPr>
-                        <a:t>0.0597</a:t>
+                        <a:t>0.7258</a:t>
                       </a:r>
                     </a:p>
                     <a:p>
@@ -27072,7 +27088,7 @@
                       </a:r>
                       <a:r>
                         <a:rPr lang="en-US" altLang="ko-KR" sz="1400" dirty="0"/>
-                        <a:t>0.0876</a:t>
+                        <a:t>0.0221</a:t>
                       </a:r>
                     </a:p>
                     <a:p>
@@ -27083,7 +27099,7 @@
                       </a:r>
                       <a:r>
                         <a:rPr lang="en-US" altLang="ko-KR" sz="1400" dirty="0"/>
-                        <a:t>0.2157</a:t>
+                        <a:t>0.0855</a:t>
                       </a:r>
                     </a:p>
                     <a:p>
@@ -27094,7 +27110,7 @@
                       </a:r>
                       <a:r>
                         <a:rPr lang="en-US" altLang="ko-KR" sz="1400" dirty="0"/>
-                        <a:t>0.2960</a:t>
+                        <a:t>0.1489</a:t>
                       </a:r>
                       <a:endParaRPr lang="pt-BR" altLang="ko-KR" sz="1400" dirty="0"/>
                     </a:p>
@@ -27847,7 +27863,11 @@
             </a:r>
             <a:r>
               <a:rPr lang="en-US" altLang="ko-KR" sz="1050" dirty="0"/>
-              <a:t>/dg)_huber2</a:t>
+              <a:t>/dg)_</a:t>
+            </a:r>
+            <a:r>
+              <a:rPr lang="en-US" altLang="ko-KR" sz="1050" dirty="0" err="1"/>
+              <a:t>huber</a:t>
             </a:r>
             <a:endParaRPr lang="ko-KR" altLang="en-US" sz="1050" dirty="0">
               <a:latin typeface="+mj-ea"/>
@@ -28539,8 +28559,8 @@
         </p:blipFill>
         <p:spPr>
           <a:xfrm>
-            <a:off x="9770707" y="1395920"/>
-            <a:ext cx="2114377" cy="1120523"/>
+            <a:off x="9770707" y="1399015"/>
+            <a:ext cx="2114377" cy="1114333"/>
           </a:xfrm>
           <a:prstGeom prst="rect">
             <a:avLst/>
@@ -28689,8 +28709,8 @@
         </p:blipFill>
         <p:spPr>
           <a:xfrm>
-            <a:off x="7419557" y="638495"/>
-            <a:ext cx="4453671" cy="681074"/>
+            <a:off x="7419557" y="641817"/>
+            <a:ext cx="4453671" cy="674430"/>
           </a:xfrm>
           <a:prstGeom prst="rect">
             <a:avLst/>
@@ -28964,7 +28984,11 @@
             </a:r>
             <a:r>
               <a:rPr lang="en-US" altLang="ko-KR" sz="1050" dirty="0"/>
-              <a:t>/dg)_huber2</a:t>
+              <a:t>/dg)_</a:t>
+            </a:r>
+            <a:r>
+              <a:rPr lang="en-US" altLang="ko-KR" sz="1050" dirty="0" err="1"/>
+              <a:t>huber</a:t>
             </a:r>
             <a:endParaRPr lang="ko-KR" altLang="en-US" sz="1050" dirty="0">
               <a:latin typeface="+mj-ea"/>
@@ -29092,7 +29116,7 @@
           <p:nvPr>
             <p:extLst>
               <p:ext uri="{D42A27DB-BD31-4B8C-83A1-F6EECF244321}">
-                <p14:modId xmlns:p14="http://schemas.microsoft.com/office/powerpoint/2010/main" val="3069468836"/>
+                <p14:modId xmlns:p14="http://schemas.microsoft.com/office/powerpoint/2010/main" val="1551595691"/>
               </p:ext>
             </p:extLst>
           </p:nvPr>
@@ -29196,7 +29220,7 @@
                             <a:srgbClr val="FF0000"/>
                           </a:solidFill>
                         </a:rPr>
-                        <a:t>-0.3854</a:t>
+                        <a:t>0.5169</a:t>
                       </a:r>
                     </a:p>
                     <a:p>
@@ -29207,7 +29231,7 @@
                       </a:r>
                       <a:r>
                         <a:rPr lang="en-US" altLang="ko-KR" sz="1400" dirty="0"/>
-                        <a:t>0.0739</a:t>
+                        <a:t>0.0229</a:t>
                       </a:r>
                     </a:p>
                     <a:p>
@@ -29218,7 +29242,7 @@
                       </a:r>
                       <a:r>
                         <a:rPr lang="en-US" altLang="ko-KR" sz="1400" dirty="0"/>
-                        <a:t>0.1788</a:t>
+                        <a:t>0.1216</a:t>
                       </a:r>
                     </a:p>
                     <a:p>
@@ -29229,7 +29253,7 @@
                       </a:r>
                       <a:r>
                         <a:rPr lang="en-US" altLang="ko-KR" sz="1400" dirty="0"/>
-                        <a:t>0.2720</a:t>
+                        <a:t>0.1515</a:t>
                       </a:r>
                       <a:endParaRPr lang="pt-BR" altLang="ko-KR" sz="1400" dirty="0"/>
                     </a:p>
@@ -30707,8 +30731,8 @@
         </p:blipFill>
         <p:spPr>
           <a:xfrm>
-            <a:off x="9758527" y="1398250"/>
-            <a:ext cx="2138738" cy="1115863"/>
+            <a:off x="9759729" y="1398250"/>
+            <a:ext cx="2136333" cy="1115863"/>
           </a:xfrm>
           <a:prstGeom prst="rect">
             <a:avLst/>
@@ -30857,8 +30881,8 @@
         </p:blipFill>
         <p:spPr>
           <a:xfrm>
-            <a:off x="7466229" y="638495"/>
-            <a:ext cx="4431036" cy="681074"/>
+            <a:off x="7466229" y="641227"/>
+            <a:ext cx="4431036" cy="675611"/>
           </a:xfrm>
           <a:prstGeom prst="rect">
             <a:avLst/>
@@ -31104,7 +31128,7 @@
           <p:nvPr>
             <p:extLst>
               <p:ext uri="{D42A27DB-BD31-4B8C-83A1-F6EECF244321}">
-                <p14:modId xmlns:p14="http://schemas.microsoft.com/office/powerpoint/2010/main" val="816934086"/>
+                <p14:modId xmlns:p14="http://schemas.microsoft.com/office/powerpoint/2010/main" val="3918839526"/>
               </p:ext>
             </p:extLst>
           </p:nvPr>
@@ -31208,7 +31232,7 @@
                             <a:srgbClr val="FF0000"/>
                           </a:solidFill>
                         </a:rPr>
-                        <a:t>0.2690</a:t>
+                        <a:t>0.5333</a:t>
                       </a:r>
                     </a:p>
                     <a:p>
@@ -31219,7 +31243,7 @@
                       </a:r>
                       <a:r>
                         <a:rPr lang="en-US" altLang="ko-KR" sz="1400" dirty="0"/>
-                        <a:t>0.0681</a:t>
+                        <a:t>0.0377</a:t>
                       </a:r>
                     </a:p>
                     <a:p>
@@ -31230,7 +31254,7 @@
                       </a:r>
                       <a:r>
                         <a:rPr lang="en-US" altLang="ko-KR" sz="1400" dirty="0"/>
-                        <a:t>0.1973</a:t>
+                        <a:t>0.1245</a:t>
                       </a:r>
                     </a:p>
                     <a:p>
@@ -31241,7 +31265,7 @@
                       </a:r>
                       <a:r>
                         <a:rPr lang="en-US" altLang="ko-KR" sz="1400" dirty="0"/>
-                        <a:t>0.2609</a:t>
+                        <a:t>0.1943</a:t>
                       </a:r>
                       <a:endParaRPr lang="pt-BR" altLang="ko-KR" sz="1400" dirty="0"/>
                     </a:p>
@@ -32812,8 +32836,8 @@
         </p:blipFill>
         <p:spPr>
           <a:xfrm>
-            <a:off x="9767009" y="1399796"/>
-            <a:ext cx="2121773" cy="1112771"/>
+            <a:off x="9767009" y="1400374"/>
+            <a:ext cx="2121773" cy="1111614"/>
           </a:xfrm>
           <a:prstGeom prst="rect">
             <a:avLst/>
@@ -32962,8 +32986,8 @@
         </p:blipFill>
         <p:spPr>
           <a:xfrm>
-            <a:off x="7419558" y="638495"/>
-            <a:ext cx="4470398" cy="681074"/>
+            <a:off x="7419558" y="640550"/>
+            <a:ext cx="4470398" cy="676963"/>
           </a:xfrm>
           <a:prstGeom prst="rect">
             <a:avLst/>
@@ -33209,7 +33233,7 @@
           <p:nvPr>
             <p:extLst>
               <p:ext uri="{D42A27DB-BD31-4B8C-83A1-F6EECF244321}">
-                <p14:modId xmlns:p14="http://schemas.microsoft.com/office/powerpoint/2010/main" val="1880288941"/>
+                <p14:modId xmlns:p14="http://schemas.microsoft.com/office/powerpoint/2010/main" val="3648204779"/>
               </p:ext>
             </p:extLst>
           </p:nvPr>
@@ -33313,7 +33337,7 @@
                             <a:srgbClr val="FF0000"/>
                           </a:solidFill>
                         </a:rPr>
-                        <a:t>0.4445</a:t>
+                        <a:t>-0.2634</a:t>
                       </a:r>
                     </a:p>
                     <a:p>
@@ -33324,7 +33348,7 @@
                       </a:r>
                       <a:r>
                         <a:rPr lang="en-US" altLang="ko-KR" sz="1400" dirty="0"/>
-                        <a:t>0.0296</a:t>
+                        <a:t>0.0600</a:t>
                       </a:r>
                     </a:p>
                     <a:p>
@@ -33335,7 +33359,7 @@
                       </a:r>
                       <a:r>
                         <a:rPr lang="en-US" altLang="ko-KR" sz="1400" dirty="0"/>
-                        <a:t>0.1402</a:t>
+                        <a:t>0.2021</a:t>
                       </a:r>
                     </a:p>
                     <a:p>
@@ -33346,7 +33370,7 @@
                       </a:r>
                       <a:r>
                         <a:rPr lang="en-US" altLang="ko-KR" sz="1400" dirty="0"/>
-                        <a:t>0.1722</a:t>
+                        <a:t>0.2450</a:t>
                       </a:r>
                       <a:endParaRPr lang="pt-BR" altLang="ko-KR" sz="1400" dirty="0"/>
                     </a:p>
@@ -34906,8 +34930,8 @@
         </p:blipFill>
         <p:spPr>
           <a:xfrm>
-            <a:off x="9758527" y="1397143"/>
-            <a:ext cx="2138738" cy="1118077"/>
+            <a:off x="9760842" y="1397143"/>
+            <a:ext cx="2134107" cy="1118077"/>
           </a:xfrm>
           <a:prstGeom prst="rect">
             <a:avLst/>
@@ -35056,8 +35080,8 @@
         </p:blipFill>
         <p:spPr>
           <a:xfrm>
-            <a:off x="7466229" y="638495"/>
-            <a:ext cx="4431036" cy="681074"/>
+            <a:off x="7466229" y="641227"/>
+            <a:ext cx="4431036" cy="675611"/>
           </a:xfrm>
           <a:prstGeom prst="rect">
             <a:avLst/>
@@ -35303,7 +35327,7 @@
           <p:nvPr>
             <p:extLst>
               <p:ext uri="{D42A27DB-BD31-4B8C-83A1-F6EECF244321}">
-                <p14:modId xmlns:p14="http://schemas.microsoft.com/office/powerpoint/2010/main" val="3184437489"/>
+                <p14:modId xmlns:p14="http://schemas.microsoft.com/office/powerpoint/2010/main" val="167065920"/>
               </p:ext>
             </p:extLst>
           </p:nvPr>
@@ -35407,7 +35431,7 @@
                             <a:srgbClr val="FF0000"/>
                           </a:solidFill>
                         </a:rPr>
-                        <a:t>0.0864</a:t>
+                        <a:t>0.5535</a:t>
                       </a:r>
                     </a:p>
                     <a:p>
@@ -35418,7 +35442,7 @@
                       </a:r>
                       <a:r>
                         <a:rPr lang="en-US" altLang="ko-KR" sz="1400" dirty="0"/>
-                        <a:t>0.0851</a:t>
+                        <a:t>0.0361</a:t>
                       </a:r>
                     </a:p>
                     <a:p>
@@ -35429,7 +35453,7 @@
                       </a:r>
                       <a:r>
                         <a:rPr lang="en-US" altLang="ko-KR" sz="1400" dirty="0"/>
-                        <a:t>0.2426</a:t>
+                        <a:t>0.1023</a:t>
                       </a:r>
                     </a:p>
                     <a:p>
@@ -35440,7 +35464,7 @@
                       </a:r>
                       <a:r>
                         <a:rPr lang="en-US" altLang="ko-KR" sz="1400" dirty="0"/>
-                        <a:t>0.2917</a:t>
+                        <a:t>0.1900</a:t>
                       </a:r>
                       <a:endParaRPr lang="pt-BR" altLang="ko-KR" sz="1400" dirty="0"/>
                     </a:p>

--- a/ParallelLSTM/result/성능개선 3 , 4 통합 결과.pptx
+++ b/ParallelLSTM/result/성능개선 3 , 4 통합 결과.pptx
@@ -286,7 +286,7 @@
           <a:p>
             <a:fld id="{B72759B8-7332-44BD-B1FF-13450B6DA7DC}" type="datetimeFigureOut">
               <a:rPr lang="ko-KR" altLang="en-US" smtClean="0"/>
-              <a:t>2026-01-19</a:t>
+              <a:t>2026-01-22</a:t>
             </a:fld>
             <a:endParaRPr lang="ko-KR" altLang="en-US"/>
           </a:p>
@@ -456,7 +456,7 @@
           <a:p>
             <a:fld id="{B72759B8-7332-44BD-B1FF-13450B6DA7DC}" type="datetimeFigureOut">
               <a:rPr lang="ko-KR" altLang="en-US" smtClean="0"/>
-              <a:t>2026-01-19</a:t>
+              <a:t>2026-01-22</a:t>
             </a:fld>
             <a:endParaRPr lang="ko-KR" altLang="en-US"/>
           </a:p>
@@ -636,7 +636,7 @@
           <a:p>
             <a:fld id="{B72759B8-7332-44BD-B1FF-13450B6DA7DC}" type="datetimeFigureOut">
               <a:rPr lang="ko-KR" altLang="en-US" smtClean="0"/>
-              <a:t>2026-01-19</a:t>
+              <a:t>2026-01-22</a:t>
             </a:fld>
             <a:endParaRPr lang="ko-KR" altLang="en-US"/>
           </a:p>
@@ -806,7 +806,7 @@
           <a:p>
             <a:fld id="{B72759B8-7332-44BD-B1FF-13450B6DA7DC}" type="datetimeFigureOut">
               <a:rPr lang="ko-KR" altLang="en-US" smtClean="0"/>
-              <a:t>2026-01-19</a:t>
+              <a:t>2026-01-22</a:t>
             </a:fld>
             <a:endParaRPr lang="ko-KR" altLang="en-US"/>
           </a:p>
@@ -1057,7 +1057,7 @@
           <a:p>
             <a:fld id="{B72759B8-7332-44BD-B1FF-13450B6DA7DC}" type="datetimeFigureOut">
               <a:rPr lang="ko-KR" altLang="en-US" smtClean="0"/>
-              <a:t>2026-01-19</a:t>
+              <a:t>2026-01-22</a:t>
             </a:fld>
             <a:endParaRPr lang="ko-KR" altLang="en-US"/>
           </a:p>
@@ -1289,7 +1289,7 @@
           <a:p>
             <a:fld id="{B72759B8-7332-44BD-B1FF-13450B6DA7DC}" type="datetimeFigureOut">
               <a:rPr lang="ko-KR" altLang="en-US" smtClean="0"/>
-              <a:t>2026-01-19</a:t>
+              <a:t>2026-01-22</a:t>
             </a:fld>
             <a:endParaRPr lang="ko-KR" altLang="en-US"/>
           </a:p>
@@ -1636,7 +1636,7 @@
           <a:p>
             <a:fld id="{B72759B8-7332-44BD-B1FF-13450B6DA7DC}" type="datetimeFigureOut">
               <a:rPr lang="ko-KR" altLang="en-US" smtClean="0"/>
-              <a:t>2026-01-19</a:t>
+              <a:t>2026-01-22</a:t>
             </a:fld>
             <a:endParaRPr lang="ko-KR" altLang="en-US"/>
           </a:p>
@@ -1754,7 +1754,7 @@
           <a:p>
             <a:fld id="{B72759B8-7332-44BD-B1FF-13450B6DA7DC}" type="datetimeFigureOut">
               <a:rPr lang="ko-KR" altLang="en-US" smtClean="0"/>
-              <a:t>2026-01-19</a:t>
+              <a:t>2026-01-22</a:t>
             </a:fld>
             <a:endParaRPr lang="ko-KR" altLang="en-US"/>
           </a:p>
@@ -1872,7 +1872,7 @@
           <a:p>
             <a:fld id="{B72759B8-7332-44BD-B1FF-13450B6DA7DC}" type="datetimeFigureOut">
               <a:rPr lang="ko-KR" altLang="en-US" smtClean="0"/>
-              <a:t>2026-01-19</a:t>
+              <a:t>2026-01-22</a:t>
             </a:fld>
             <a:endParaRPr lang="ko-KR" altLang="en-US"/>
           </a:p>
@@ -2156,7 +2156,7 @@
           <a:p>
             <a:fld id="{B72759B8-7332-44BD-B1FF-13450B6DA7DC}" type="datetimeFigureOut">
               <a:rPr lang="ko-KR" altLang="en-US" smtClean="0"/>
-              <a:t>2026-01-19</a:t>
+              <a:t>2026-01-22</a:t>
             </a:fld>
             <a:endParaRPr lang="ko-KR" altLang="en-US"/>
           </a:p>
@@ -2420,7 +2420,7 @@
           <a:p>
             <a:fld id="{B72759B8-7332-44BD-B1FF-13450B6DA7DC}" type="datetimeFigureOut">
               <a:rPr lang="ko-KR" altLang="en-US" smtClean="0"/>
-              <a:t>2026-01-19</a:t>
+              <a:t>2026-01-22</a:t>
             </a:fld>
             <a:endParaRPr lang="ko-KR" altLang="en-US"/>
           </a:p>
@@ -2634,7 +2634,7 @@
           <a:p>
             <a:fld id="{B72759B8-7332-44BD-B1FF-13450B6DA7DC}" type="datetimeFigureOut">
               <a:rPr lang="ko-KR" altLang="en-US" smtClean="0"/>
-              <a:t>2026-01-19</a:t>
+              <a:t>2026-01-22</a:t>
             </a:fld>
             <a:endParaRPr lang="ko-KR" altLang="en-US"/>
           </a:p>
@@ -4749,7 +4749,7 @@
                         <a:t>rmse : </a:t>
                       </a:r>
                       <a:r>
-                        <a:rPr lang="en-US" altLang="ko-KR" sz="1400"/>
+                        <a:rPr lang="en-US" altLang="ko-KR" sz="1400" dirty="0"/>
                         <a:t>0.2164</a:t>
                       </a:r>
                       <a:endParaRPr lang="pt-BR" altLang="ko-KR" sz="1400" dirty="0"/>
@@ -9991,7 +9991,7 @@
         </p:blipFill>
         <p:spPr>
           <a:xfrm>
-            <a:off x="9767009" y="1397588"/>
+            <a:off x="9774267" y="1388994"/>
             <a:ext cx="2121773" cy="1117187"/>
           </a:xfrm>
           <a:prstGeom prst="rect">
@@ -20337,8 +20337,8 @@
         </p:blipFill>
         <p:spPr>
           <a:xfrm>
-            <a:off x="9762147" y="5411703"/>
-            <a:ext cx="2144214" cy="1123159"/>
+            <a:off x="9762147" y="5412863"/>
+            <a:ext cx="2144214" cy="1120838"/>
           </a:xfrm>
           <a:prstGeom prst="rect">
             <a:avLst/>
@@ -20373,8 +20373,8 @@
         </p:blipFill>
         <p:spPr>
           <a:xfrm>
-            <a:off x="9758527" y="1398355"/>
-            <a:ext cx="2138738" cy="1115651"/>
+            <a:off x="9779306" y="1398355"/>
+            <a:ext cx="2097179" cy="1115651"/>
           </a:xfrm>
           <a:prstGeom prst="rect">
             <a:avLst/>
@@ -20446,8 +20446,8 @@
         </p:blipFill>
         <p:spPr>
           <a:xfrm>
-            <a:off x="9771381" y="3361947"/>
-            <a:ext cx="2123518" cy="1117135"/>
+            <a:off x="9780103" y="3361947"/>
+            <a:ext cx="2106073" cy="1117135"/>
           </a:xfrm>
           <a:prstGeom prst="rect">
             <a:avLst/>
@@ -20939,7 +20939,11 @@
             <a:graphicFrameLocks noGrp="1"/>
           </p:cNvGraphicFramePr>
           <p:nvPr>
-            <p:extLst/>
+            <p:extLst>
+              <p:ext uri="{D42A27DB-BD31-4B8C-83A1-F6EECF244321}">
+                <p14:modId xmlns:p14="http://schemas.microsoft.com/office/powerpoint/2010/main" val="1431603643"/>
+              </p:ext>
+            </p:extLst>
           </p:nvPr>
         </p:nvGraphicFramePr>
         <p:xfrm>
@@ -21037,7 +21041,7 @@
                       </a:r>
                       <a:r>
                         <a:rPr lang="en-US" altLang="ko-KR" sz="1400" dirty="0"/>
-                        <a:t>0.9086</a:t>
+                        <a:t>0.8748</a:t>
                       </a:r>
                     </a:p>
                     <a:p>
@@ -21048,7 +21052,7 @@
                       </a:r>
                       <a:r>
                         <a:rPr lang="en-US" altLang="ko-KR" sz="1400" dirty="0"/>
-                        <a:t>0.0557</a:t>
+                        <a:t>0.0763</a:t>
                       </a:r>
                     </a:p>
                     <a:p>
@@ -21059,7 +21063,7 @@
                       </a:r>
                       <a:r>
                         <a:rPr lang="en-US" altLang="ko-KR" sz="1400" dirty="0"/>
-                        <a:t>0.1438</a:t>
+                        <a:t>0.1754</a:t>
                       </a:r>
                     </a:p>
                     <a:p>
@@ -21070,7 +21074,7 @@
                       </a:r>
                       <a:r>
                         <a:rPr lang="en-US" altLang="ko-KR" sz="1400" dirty="0"/>
-                        <a:t>0.2361</a:t>
+                        <a:t>0.2763</a:t>
                       </a:r>
                       <a:endParaRPr lang="pt-BR" altLang="ko-KR" sz="1400" dirty="0"/>
                     </a:p>
@@ -21110,8 +21114,12 @@
                         <a:t>r2 : </a:t>
                       </a:r>
                       <a:r>
-                        <a:rPr lang="en-US" altLang="ko-KR" sz="1400" dirty="0"/>
-                        <a:t>0.8939</a:t>
+                        <a:rPr lang="en-US" altLang="ko-KR" sz="1400" dirty="0">
+                          <a:solidFill>
+                            <a:srgbClr val="FF0000"/>
+                          </a:solidFill>
+                        </a:rPr>
+                        <a:t>0.5503</a:t>
                       </a:r>
                       <a:endParaRPr lang="pt-BR" altLang="ko-KR" sz="1400" dirty="0">
                         <a:solidFill>
@@ -21127,7 +21135,7 @@
                       </a:r>
                       <a:r>
                         <a:rPr lang="en-US" altLang="ko-KR" sz="1400" dirty="0"/>
-                        <a:t>0.0148</a:t>
+                        <a:t>0.0629</a:t>
                       </a:r>
                     </a:p>
                     <a:p>
@@ -21138,7 +21146,7 @@
                       </a:r>
                       <a:r>
                         <a:rPr lang="en-US" altLang="ko-KR" sz="1400" dirty="0"/>
-                        <a:t>0.0947</a:t>
+                        <a:t>0.2047</a:t>
                       </a:r>
                       <a:endParaRPr lang="pt-BR" altLang="ko-KR" sz="1400" dirty="0"/>
                     </a:p>
@@ -21150,7 +21158,7 @@
                       </a:r>
                       <a:r>
                         <a:rPr lang="en-US" altLang="ko-KR" sz="1400" dirty="0"/>
-                        <a:t>0.1218</a:t>
+                        <a:t>0.2509</a:t>
                       </a:r>
                       <a:endParaRPr lang="ko-KR" altLang="en-US" sz="1400" b="0" dirty="0"/>
                     </a:p>
@@ -21191,7 +21199,7 @@
                       </a:r>
                       <a:r>
                         <a:rPr lang="en-US" altLang="ko-KR" sz="1400" dirty="0"/>
-                        <a:t>0.9252</a:t>
+                        <a:t>0.8659</a:t>
                       </a:r>
                       <a:endParaRPr lang="pt-BR" altLang="ko-KR" sz="1400" dirty="0"/>
                     </a:p>
@@ -21203,7 +21211,7 @@
                       </a:r>
                       <a:r>
                         <a:rPr lang="en-US" altLang="ko-KR" sz="1400" dirty="0"/>
-                        <a:t>0.0680</a:t>
+                        <a:t>0.1219</a:t>
                       </a:r>
                       <a:endParaRPr lang="pt-BR" altLang="ko-KR" sz="1400" dirty="0"/>
                     </a:p>
@@ -21215,7 +21223,7 @@
                       </a:r>
                       <a:r>
                         <a:rPr lang="en-US" altLang="ko-KR" sz="1400" dirty="0"/>
-                        <a:t>0.2035</a:t>
+                        <a:t>0.2258</a:t>
                       </a:r>
                       <a:endParaRPr lang="pt-BR" altLang="ko-KR" sz="1400" dirty="0"/>
                     </a:p>
@@ -21227,7 +21235,7 @@
                       </a:r>
                       <a:r>
                         <a:rPr lang="en-US" altLang="ko-KR" sz="1400" dirty="0"/>
-                        <a:t>0.2608</a:t>
+                        <a:t>0.3492</a:t>
                       </a:r>
                       <a:endParaRPr lang="ko-KR" altLang="en-US" sz="1400" b="0" dirty="0"/>
                     </a:p>
@@ -21354,8 +21362,8 @@
         </p:blipFill>
         <p:spPr>
           <a:xfrm>
-            <a:off x="9773011" y="5414986"/>
-            <a:ext cx="2122486" cy="1116592"/>
+            <a:off x="9773011" y="5418264"/>
+            <a:ext cx="2122486" cy="1110035"/>
           </a:xfrm>
           <a:prstGeom prst="rect">
             <a:avLst/>
@@ -21390,8 +21398,8 @@
         </p:blipFill>
         <p:spPr>
           <a:xfrm>
-            <a:off x="9768969" y="1403554"/>
-            <a:ext cx="2117853" cy="1105254"/>
+            <a:off x="9783369" y="1403554"/>
+            <a:ext cx="2089052" cy="1105254"/>
           </a:xfrm>
           <a:prstGeom prst="rect">
             <a:avLst/>
@@ -21463,8 +21471,8 @@
         </p:blipFill>
         <p:spPr>
           <a:xfrm>
-            <a:off x="9771381" y="3369170"/>
-            <a:ext cx="2123518" cy="1102688"/>
+            <a:off x="9794421" y="3369170"/>
+            <a:ext cx="2077438" cy="1102688"/>
           </a:xfrm>
           <a:prstGeom prst="rect">
             <a:avLst/>
@@ -21958,7 +21966,7 @@
           <p:nvPr>
             <p:extLst>
               <p:ext uri="{D42A27DB-BD31-4B8C-83A1-F6EECF244321}">
-                <p14:modId xmlns:p14="http://schemas.microsoft.com/office/powerpoint/2010/main" val="904875855"/>
+                <p14:modId xmlns:p14="http://schemas.microsoft.com/office/powerpoint/2010/main" val="580642745"/>
               </p:ext>
             </p:extLst>
           </p:nvPr>
@@ -22084,7 +22092,7 @@
                       </a:r>
                       <a:r>
                         <a:rPr lang="en-US" altLang="ko-KR" sz="1400" dirty="0"/>
-                        <a:t>0.0960</a:t>
+                        <a:t>0.0860</a:t>
                       </a:r>
                     </a:p>
                     <a:p>
@@ -22095,7 +22103,7 @@
                       </a:r>
                       <a:r>
                         <a:rPr lang="en-US" altLang="ko-KR" sz="1400" dirty="0"/>
-                        <a:t>0.1243</a:t>
+                        <a:t>0.1244</a:t>
                       </a:r>
                       <a:endParaRPr lang="pt-BR" altLang="ko-KR" sz="1400" dirty="0"/>
                     </a:p>
@@ -22136,7 +22144,7 @@
                       </a:r>
                       <a:r>
                         <a:rPr lang="en-US" altLang="ko-KR" sz="1400" dirty="0"/>
-                        <a:t>0.9579</a:t>
+                        <a:t>0.9470</a:t>
                       </a:r>
                       <a:endParaRPr lang="pt-BR" altLang="ko-KR" sz="1400" dirty="0"/>
                     </a:p>
@@ -22148,7 +22156,7 @@
                       </a:r>
                       <a:r>
                         <a:rPr lang="en-US" altLang="ko-KR" sz="1400" dirty="0"/>
-                        <a:t>0.0194</a:t>
+                        <a:t>0.0244</a:t>
                       </a:r>
                     </a:p>
                     <a:p>
@@ -22159,7 +22167,7 @@
                       </a:r>
                       <a:r>
                         <a:rPr lang="en-US" altLang="ko-KR" sz="1400" dirty="0"/>
-                        <a:t>0.0938</a:t>
+                        <a:t>0.1098</a:t>
                       </a:r>
                       <a:endParaRPr lang="pt-BR" altLang="ko-KR" sz="1400" dirty="0"/>
                     </a:p>
@@ -22171,7 +22179,7 @@
                       </a:r>
                       <a:r>
                         <a:rPr lang="en-US" altLang="ko-KR" sz="1400" dirty="0"/>
-                        <a:t>0.1393</a:t>
+                        <a:t>0.1563</a:t>
                       </a:r>
                       <a:endParaRPr lang="ko-KR" altLang="en-US" sz="1400" b="0" dirty="0"/>
                     </a:p>
@@ -22211,12 +22219,8 @@
                         <a:t>r2 : </a:t>
                       </a:r>
                       <a:r>
-                        <a:rPr lang="en-US" altLang="ko-KR" sz="1400" dirty="0">
-                          <a:solidFill>
-                            <a:srgbClr val="FF0000"/>
-                          </a:solidFill>
-                        </a:rPr>
-                        <a:t>0.7833</a:t>
+                        <a:rPr lang="en-US" altLang="ko-KR" sz="1400" dirty="0"/>
+                        <a:t>0.8781</a:t>
                       </a:r>
                       <a:endParaRPr lang="pt-BR" altLang="ko-KR" sz="1400" dirty="0">
                         <a:solidFill>
@@ -22232,7 +22236,7 @@
                       </a:r>
                       <a:r>
                         <a:rPr lang="en-US" altLang="ko-KR" sz="1400" dirty="0"/>
-                        <a:t>0.0752</a:t>
+                        <a:t>0.0423</a:t>
                       </a:r>
                       <a:endParaRPr lang="pt-BR" altLang="ko-KR" sz="1400" dirty="0"/>
                     </a:p>
@@ -22244,7 +22248,7 @@
                       </a:r>
                       <a:r>
                         <a:rPr lang="en-US" altLang="ko-KR" sz="1400" dirty="0"/>
-                        <a:t>0.2001</a:t>
+                        <a:t>0.1589</a:t>
                       </a:r>
                       <a:endParaRPr lang="pt-BR" altLang="ko-KR" sz="1400" dirty="0"/>
                     </a:p>
@@ -22256,7 +22260,7 @@
                       </a:r>
                       <a:r>
                         <a:rPr lang="en-US" altLang="ko-KR" sz="1400" dirty="0"/>
-                        <a:t>0.2742</a:t>
+                        <a:t>0.2056</a:t>
                       </a:r>
                       <a:endParaRPr lang="ko-KR" altLang="en-US" sz="1400" b="0" dirty="0"/>
                     </a:p>
@@ -32986,7 +32990,7 @@
         </p:blipFill>
         <p:spPr>
           <a:xfrm>
-            <a:off x="7419558" y="640550"/>
+            <a:off x="7419556" y="642606"/>
             <a:ext cx="4470398" cy="676963"/>
           </a:xfrm>
           <a:prstGeom prst="rect">
